--- a/Your Grace is Enough.pptx
+++ b/Your Grace is Enough.pptx
@@ -17,6 +17,7 @@
     <p:sldId id="286" r:id="rId11"/>
     <p:sldId id="287" r:id="rId12"/>
     <p:sldId id="288" r:id="rId13"/>
+    <p:sldId id="291" r:id="rId14"/>
   </p:sldIdLst>
   <p:sldSz cx="9144000" cy="6858000" type="screen4x3"/>
   <p:notesSz cx="6858000" cy="9144000"/>
@@ -254,7 +255,7 @@
           <a:p>
             <a:fld id="{E759A0DE-F190-5444-87AC-4719D5F20D15}" type="datetimeFigureOut">
               <a:rPr lang="en-US" smtClean="0"/>
-              <a:t>9/3/26</a:t>
+              <a:t>9/4/26</a:t>
             </a:fld>
             <a:endParaRPr lang="en-US"/>
           </a:p>
@@ -424,7 +425,7 @@
           <a:p>
             <a:fld id="{E759A0DE-F190-5444-87AC-4719D5F20D15}" type="datetimeFigureOut">
               <a:rPr lang="en-US" smtClean="0"/>
-              <a:t>9/3/26</a:t>
+              <a:t>9/4/26</a:t>
             </a:fld>
             <a:endParaRPr lang="en-US"/>
           </a:p>
@@ -604,7 +605,7 @@
           <a:p>
             <a:fld id="{E759A0DE-F190-5444-87AC-4719D5F20D15}" type="datetimeFigureOut">
               <a:rPr lang="en-US" smtClean="0"/>
-              <a:t>9/3/26</a:t>
+              <a:t>9/4/26</a:t>
             </a:fld>
             <a:endParaRPr lang="en-US"/>
           </a:p>
@@ -774,7 +775,7 @@
           <a:p>
             <a:fld id="{E759A0DE-F190-5444-87AC-4719D5F20D15}" type="datetimeFigureOut">
               <a:rPr lang="en-US" smtClean="0"/>
-              <a:t>9/3/26</a:t>
+              <a:t>9/4/26</a:t>
             </a:fld>
             <a:endParaRPr lang="en-US"/>
           </a:p>
@@ -1020,7 +1021,7 @@
           <a:p>
             <a:fld id="{E759A0DE-F190-5444-87AC-4719D5F20D15}" type="datetimeFigureOut">
               <a:rPr lang="en-US" smtClean="0"/>
-              <a:t>9/3/26</a:t>
+              <a:t>9/4/26</a:t>
             </a:fld>
             <a:endParaRPr lang="en-US"/>
           </a:p>
@@ -1252,7 +1253,7 @@
           <a:p>
             <a:fld id="{E759A0DE-F190-5444-87AC-4719D5F20D15}" type="datetimeFigureOut">
               <a:rPr lang="en-US" smtClean="0"/>
-              <a:t>9/3/26</a:t>
+              <a:t>9/4/26</a:t>
             </a:fld>
             <a:endParaRPr lang="en-US"/>
           </a:p>
@@ -1619,7 +1620,7 @@
           <a:p>
             <a:fld id="{E759A0DE-F190-5444-87AC-4719D5F20D15}" type="datetimeFigureOut">
               <a:rPr lang="en-US" smtClean="0"/>
-              <a:t>9/3/26</a:t>
+              <a:t>9/4/26</a:t>
             </a:fld>
             <a:endParaRPr lang="en-US"/>
           </a:p>
@@ -1737,7 +1738,7 @@
           <a:p>
             <a:fld id="{E759A0DE-F190-5444-87AC-4719D5F20D15}" type="datetimeFigureOut">
               <a:rPr lang="en-US" smtClean="0"/>
-              <a:t>9/3/26</a:t>
+              <a:t>9/4/26</a:t>
             </a:fld>
             <a:endParaRPr lang="en-US"/>
           </a:p>
@@ -1832,7 +1833,7 @@
           <a:p>
             <a:fld id="{E759A0DE-F190-5444-87AC-4719D5F20D15}" type="datetimeFigureOut">
               <a:rPr lang="en-US" smtClean="0"/>
-              <a:t>9/3/26</a:t>
+              <a:t>9/4/26</a:t>
             </a:fld>
             <a:endParaRPr lang="en-US"/>
           </a:p>
@@ -2109,7 +2110,7 @@
           <a:p>
             <a:fld id="{E759A0DE-F190-5444-87AC-4719D5F20D15}" type="datetimeFigureOut">
               <a:rPr lang="en-US" smtClean="0"/>
-              <a:t>9/3/26</a:t>
+              <a:t>9/4/26</a:t>
             </a:fld>
             <a:endParaRPr lang="en-US"/>
           </a:p>
@@ -2366,7 +2367,7 @@
           <a:p>
             <a:fld id="{E759A0DE-F190-5444-87AC-4719D5F20D15}" type="datetimeFigureOut">
               <a:rPr lang="en-US" smtClean="0"/>
-              <a:t>9/3/26</a:t>
+              <a:t>9/4/26</a:t>
             </a:fld>
             <a:endParaRPr lang="en-US"/>
           </a:p>
@@ -2579,7 +2580,7 @@
           <a:p>
             <a:fld id="{E759A0DE-F190-5444-87AC-4719D5F20D15}" type="datetimeFigureOut">
               <a:rPr lang="en-US" smtClean="0"/>
-              <a:t>9/3/26</a:t>
+              <a:t>9/4/26</a:t>
             </a:fld>
             <a:endParaRPr lang="en-US"/>
           </a:p>
@@ -3440,90 +3441,6 @@
           </a:bodyPr>
           <a:lstStyle/>
           <a:p>
-            <a:r>
-              <a:rPr lang="en-US" sz="4400" dirty="0">
-                <a:solidFill>
-                  <a:schemeClr val="bg1"/>
-                </a:solidFill>
-                <a:latin typeface="Avenir Medium" panose="02000503020000020003" pitchFamily="2" charset="0"/>
-                <a:ea typeface="Bodoni Ornaments" pitchFamily="2" charset="0"/>
-              </a:rPr>
-              <a:t>Your grace is enough</a:t>
-            </a:r>
-          </a:p>
-          <a:p>
-            <a:r>
-              <a:rPr lang="en-US" sz="4400" dirty="0">
-                <a:solidFill>
-                  <a:schemeClr val="bg1"/>
-                </a:solidFill>
-                <a:latin typeface="Avenir Medium" panose="02000503020000020003" pitchFamily="2" charset="0"/>
-                <a:ea typeface="Bodoni Ornaments" pitchFamily="2" charset="0"/>
-              </a:rPr>
-              <a:t>Heaven reaching down to us</a:t>
-            </a:r>
-          </a:p>
-          <a:p>
-            <a:r>
-              <a:rPr lang="en-US" sz="4400" dirty="0">
-                <a:solidFill>
-                  <a:schemeClr val="bg1"/>
-                </a:solidFill>
-                <a:latin typeface="Avenir Medium" panose="02000503020000020003" pitchFamily="2" charset="0"/>
-                <a:ea typeface="Bodoni Ornaments" pitchFamily="2" charset="0"/>
-              </a:rPr>
-              <a:t>Your grace is enough for me  </a:t>
-            </a:r>
-          </a:p>
-          <a:p>
-            <a:r>
-              <a:rPr lang="en-US" sz="4400" dirty="0">
-                <a:solidFill>
-                  <a:schemeClr val="bg1"/>
-                </a:solidFill>
-                <a:latin typeface="Avenir Medium" panose="02000503020000020003" pitchFamily="2" charset="0"/>
-                <a:ea typeface="Bodoni Ornaments" pitchFamily="2" charset="0"/>
-              </a:rPr>
-              <a:t>God I see </a:t>
-            </a:r>
-          </a:p>
-          <a:p>
-            <a:r>
-              <a:rPr lang="en-US" sz="4400" dirty="0">
-                <a:solidFill>
-                  <a:schemeClr val="bg1"/>
-                </a:solidFill>
-                <a:latin typeface="Avenir Medium" panose="02000503020000020003" pitchFamily="2" charset="0"/>
-                <a:ea typeface="Bodoni Ornaments" pitchFamily="2" charset="0"/>
-              </a:rPr>
-              <a:t>Your grace is enough I am covered in Your love</a:t>
-            </a:r>
-          </a:p>
-          <a:p>
-            <a:r>
-              <a:rPr lang="en-US" sz="4400" dirty="0">
-                <a:solidFill>
-                  <a:schemeClr val="bg1"/>
-                </a:solidFill>
-                <a:latin typeface="Avenir Medium" panose="02000503020000020003" pitchFamily="2" charset="0"/>
-                <a:ea typeface="Bodoni Ornaments" pitchFamily="2" charset="0"/>
-              </a:rPr>
-              <a:t>Your grace is enough for me…</a:t>
-            </a:r>
-          </a:p>
-          <a:p>
-            <a:r>
-              <a:rPr lang="en-US" sz="4400" dirty="0">
-                <a:solidFill>
-                  <a:schemeClr val="bg1"/>
-                </a:solidFill>
-                <a:latin typeface="Avenir Medium" panose="02000503020000020003" pitchFamily="2" charset="0"/>
-                <a:ea typeface="Bodoni Ornaments" pitchFamily="2" charset="0"/>
-              </a:rPr>
-              <a:t>For me</a:t>
-            </a:r>
-          </a:p>
-          <a:p>
             <a:endParaRPr lang="en-US" sz="4400" dirty="0">
               <a:solidFill>
                 <a:schemeClr val="bg1"/>
@@ -3532,12 +3449,205 @@
               <a:ea typeface="Bodoni Ornaments" pitchFamily="2" charset="0"/>
             </a:endParaRPr>
           </a:p>
+          <a:p>
+            <a:r>
+              <a:rPr lang="en-US" sz="4400" dirty="0">
+                <a:solidFill>
+                  <a:schemeClr val="bg1"/>
+                </a:solidFill>
+                <a:latin typeface="Avenir Medium" panose="02000503020000020003" pitchFamily="2" charset="0"/>
+                <a:ea typeface="Bodoni Ornaments" pitchFamily="2" charset="0"/>
+              </a:rPr>
+              <a:t>Your grace is enough</a:t>
+            </a:r>
+          </a:p>
+          <a:p>
+            <a:r>
+              <a:rPr lang="en-US" sz="4400" dirty="0">
+                <a:solidFill>
+                  <a:schemeClr val="bg1"/>
+                </a:solidFill>
+                <a:latin typeface="Avenir Medium" panose="02000503020000020003" pitchFamily="2" charset="0"/>
+                <a:ea typeface="Bodoni Ornaments" pitchFamily="2" charset="0"/>
+              </a:rPr>
+              <a:t>Heaven reaching down to us</a:t>
+            </a:r>
+          </a:p>
+          <a:p>
+            <a:r>
+              <a:rPr lang="en-US" sz="4400" dirty="0">
+                <a:solidFill>
+                  <a:schemeClr val="bg1"/>
+                </a:solidFill>
+                <a:latin typeface="Avenir Medium" panose="02000503020000020003" pitchFamily="2" charset="0"/>
+                <a:ea typeface="Bodoni Ornaments" pitchFamily="2" charset="0"/>
+              </a:rPr>
+              <a:t>Your grace is enough for me  </a:t>
+            </a:r>
+          </a:p>
+          <a:p>
+            <a:r>
+              <a:rPr lang="en-US" sz="4400" dirty="0">
+                <a:solidFill>
+                  <a:schemeClr val="bg1"/>
+                </a:solidFill>
+                <a:latin typeface="Avenir Medium" panose="02000503020000020003" pitchFamily="2" charset="0"/>
+                <a:ea typeface="Bodoni Ornaments" pitchFamily="2" charset="0"/>
+              </a:rPr>
+              <a:t>God I see </a:t>
+            </a:r>
+          </a:p>
+          <a:p>
+            <a:endParaRPr lang="en-US" sz="4400" dirty="0">
+              <a:solidFill>
+                <a:schemeClr val="bg1"/>
+              </a:solidFill>
+              <a:latin typeface="Avenir Medium" panose="02000503020000020003" pitchFamily="2" charset="0"/>
+              <a:ea typeface="Bodoni Ornaments" pitchFamily="2" charset="0"/>
+            </a:endParaRPr>
+          </a:p>
         </p:txBody>
       </p:sp>
     </p:spTree>
     <p:extLst>
       <p:ext uri="{BB962C8B-B14F-4D97-AF65-F5344CB8AC3E}">
         <p14:creationId xmlns:p14="http://schemas.microsoft.com/office/powerpoint/2010/main" val="94100769"/>
+      </p:ext>
+    </p:extLst>
+  </p:cSld>
+  <p:clrMapOvr>
+    <a:masterClrMapping/>
+  </p:clrMapOvr>
+</p:sld>
+</file>
+
+<file path=ppt/slides/slide13.xml><?xml version="1.0" encoding="utf-8"?>
+<p:sld xmlns:a="http://schemas.openxmlformats.org/drawingml/2006/main" xmlns:r="http://schemas.openxmlformats.org/officeDocument/2006/relationships" xmlns:p="http://schemas.openxmlformats.org/presentationml/2006/main">
+  <p:cSld>
+    <p:bg>
+      <p:bgPr>
+        <a:solidFill>
+          <a:schemeClr val="tx1"/>
+        </a:solidFill>
+        <a:effectLst/>
+      </p:bgPr>
+    </p:bg>
+    <p:spTree>
+      <p:nvGrpSpPr>
+        <p:cNvPr id="1" name="">
+          <a:extLst>
+            <a:ext uri="{FF2B5EF4-FFF2-40B4-BE49-F238E27FC236}">
+              <a16:creationId xmlns:a16="http://schemas.microsoft.com/office/drawing/2014/main" id="{0167784D-98CE-91D8-C0AA-8F416D5CC16D}"/>
+            </a:ext>
+          </a:extLst>
+        </p:cNvPr>
+        <p:cNvGrpSpPr/>
+        <p:nvPr/>
+      </p:nvGrpSpPr>
+      <p:grpSpPr>
+        <a:xfrm>
+          <a:off x="0" y="0"/>
+          <a:ext cx="0" cy="0"/>
+          <a:chOff x="0" y="0"/>
+          <a:chExt cx="0" cy="0"/>
+        </a:xfrm>
+      </p:grpSpPr>
+      <p:sp>
+        <p:nvSpPr>
+          <p:cNvPr id="3" name="Subtitle 2">
+            <a:extLst>
+              <a:ext uri="{FF2B5EF4-FFF2-40B4-BE49-F238E27FC236}">
+                <a16:creationId xmlns:a16="http://schemas.microsoft.com/office/drawing/2014/main" id="{8B24DAE8-1C84-401B-5F39-D76D39E4E86F}"/>
+              </a:ext>
+            </a:extLst>
+          </p:cNvPr>
+          <p:cNvSpPr>
+            <a:spLocks noGrp="1"/>
+          </p:cNvSpPr>
+          <p:nvPr>
+            <p:ph type="subTitle" idx="1"/>
+          </p:nvPr>
+        </p:nvSpPr>
+        <p:spPr>
+          <a:xfrm>
+            <a:off x="84221" y="213360"/>
+            <a:ext cx="8891337" cy="6416040"/>
+          </a:xfrm>
+        </p:spPr>
+        <p:txBody>
+          <a:bodyPr>
+            <a:noAutofit/>
+          </a:bodyPr>
+          <a:lstStyle/>
+          <a:p>
+            <a:endParaRPr lang="en-US" sz="4400" dirty="0">
+              <a:solidFill>
+                <a:schemeClr val="bg1"/>
+              </a:solidFill>
+              <a:latin typeface="Avenir Medium" panose="02000503020000020003" pitchFamily="2" charset="0"/>
+              <a:ea typeface="Bodoni Ornaments" pitchFamily="2" charset="0"/>
+            </a:endParaRPr>
+          </a:p>
+          <a:p>
+            <a:endParaRPr lang="en-US" sz="4400" dirty="0">
+              <a:solidFill>
+                <a:schemeClr val="bg1"/>
+              </a:solidFill>
+              <a:latin typeface="Avenir Medium" panose="02000503020000020003" pitchFamily="2" charset="0"/>
+              <a:ea typeface="Bodoni Ornaments" pitchFamily="2" charset="0"/>
+            </a:endParaRPr>
+          </a:p>
+          <a:p>
+            <a:r>
+              <a:rPr lang="en-US" sz="4400" dirty="0">
+                <a:solidFill>
+                  <a:schemeClr val="bg1"/>
+                </a:solidFill>
+                <a:latin typeface="Avenir Medium" panose="02000503020000020003" pitchFamily="2" charset="0"/>
+                <a:ea typeface="Bodoni Ornaments" pitchFamily="2" charset="0"/>
+              </a:rPr>
+              <a:t>Your grace is enough I am covered in Your love</a:t>
+            </a:r>
+          </a:p>
+          <a:p>
+            <a:r>
+              <a:rPr lang="en-US" sz="4400" dirty="0">
+                <a:solidFill>
+                  <a:schemeClr val="bg1"/>
+                </a:solidFill>
+                <a:latin typeface="Avenir Medium" panose="02000503020000020003" pitchFamily="2" charset="0"/>
+                <a:ea typeface="Bodoni Ornaments" pitchFamily="2" charset="0"/>
+              </a:rPr>
+              <a:t>Your grace is enough for me…</a:t>
+            </a:r>
+          </a:p>
+          <a:p>
+            <a:r>
+              <a:rPr lang="en-US" sz="4400" dirty="0">
+                <a:solidFill>
+                  <a:schemeClr val="bg1"/>
+                </a:solidFill>
+                <a:latin typeface="Avenir Medium" panose="02000503020000020003" pitchFamily="2" charset="0"/>
+                <a:ea typeface="Bodoni Ornaments" pitchFamily="2" charset="0"/>
+              </a:rPr>
+              <a:t>For me</a:t>
+            </a:r>
+          </a:p>
+          <a:p>
+            <a:endParaRPr lang="en-US" sz="4400" dirty="0">
+              <a:solidFill>
+                <a:schemeClr val="bg1"/>
+              </a:solidFill>
+              <a:latin typeface="Avenir Medium" panose="02000503020000020003" pitchFamily="2" charset="0"/>
+              <a:ea typeface="Bodoni Ornaments" pitchFamily="2" charset="0"/>
+            </a:endParaRPr>
+          </a:p>
+        </p:txBody>
+      </p:sp>
+    </p:spTree>
+    <p:extLst>
+      <p:ext uri="{BB962C8B-B14F-4D97-AF65-F5344CB8AC3E}">
+        <p14:creationId xmlns:p14="http://schemas.microsoft.com/office/powerpoint/2010/main" val="1354496667"/>
       </p:ext>
     </p:extLst>
   </p:cSld>
